--- a/docs/reference/blog-secrets-slides/export/ブログのひみつ（仕組みと運営）.pptx
+++ b/docs/reference/blog-secrets-slides/export/ブログのひみつ（仕組みと運営）.pptx
@@ -1669,7 +1669,7 @@
           <a:p>
             <a:r>
               <a:rPr lang="en-US" dirty="0"/>
-              <a:t>このブログの専門担当は3人です。1人目、idea-generator。思いつきから、記事ネタの切り口を複数並べてくれます。どれにするかを選ぶのは人です。2人目、idea-reviewer。ネタ帳に足してよいかを審査する門番で、重複や、書けないネタを見つけます。落とすときも、代わりの置き場所を示します。3人目、post-reviewer。書き上がった下書きを、ルールブックと照らして点検する校閲担当です。3人とも、点検して指摘するだけで、ファイルは書き換えません。直すのは、人とメインのAIの仕事です。</a:t>
+              <a:t>このブログの専門担当は3人で、それぞれ名前があります。1人目、ネタ出し担当のヒラク。切り口を拓くからヒラクです。思いつきから、記事ネタの切り口を複数並べてくれます。どれにするかを選ぶのは人です。2人目、クラ。ネタ帳という蔵の番人で、足してよいかを審査します。、重複や、書けないネタを見つけます。落とすときも、代わりの置き場所を示します。3人目、アカネ。原稿に赤を入れる校閲担当で、書き上がった下書きをルールブックと照らして点検します。3人とも、点検して指摘するだけで、ファイルは書き換えません。直すのは、人とメインのAIの仕事です。</a:t>
             </a:r>
             <a:endParaRPr lang="en-US" dirty="0"/>
           </a:p>
@@ -1757,7 +1757,7 @@
           <a:p>
             <a:r>
               <a:rPr lang="en-US" dirty="0"/>
-              <a:t>ひみつ14、最後のひみつです。ここまでの部品を、全部つなげてみます。上の段は、ネタをためる流れ。人が思いつきを話すと、add-ideaという手順書が話を聞き、ネタ出し担当が切り口を並べます。ここで、どれで書くかを選ぶのは人です。次に門番が審査して、OKならネタ帳に追加されます。下の段は、記事にする流れ。write-postを始めて、人が体験を話し、AIが下書きを書き、校閲担当が点検し、人が直して送ります。送ったあとは、最初に見たロボットが公開してくれます。どの担当も、動く前にルールブックを読みます。そして、最後に決めるのは、いつも人です。</a:t>
+              <a:t>ひみつ14、最後のひみつです。ここまでの部品を、全部つなげてみます。上の段は、ネタをためる流れ。人が思いつきを話すと、add-ideaという手順書が話を聞き、ネタ出し担当のヒラクが切り口を並べます。ここで、どれで書くかを選ぶのは人です。次に門番のクラが審査して、OKならネタ帳に追加されます。下の段は、記事にする流れ。write-postを始めて、人が体験を話し、AIが下書きを書き、校閲担当のアカネが点検し、人が直して送ります。送ったあとは、最初に見たロボットが公開してくれます。どの担当も、動く前にルールブックを読みます。そして、最後に決めるのは、いつも人です。</a:t>
             </a:r>
             <a:endParaRPr lang="en-US" dirty="0"/>
           </a:p>
@@ -11826,7 +11826,7 @@
                 <a:ea typeface="BIZ UDPGothic" pitchFamily="34" charset="-122"/>
                 <a:cs typeface="BIZ UDPGothic" pitchFamily="34" charset="-120"/>
               </a:rPr>
-              <a:t>専門担当のAIに点検してもらう</a:t>
+              <a:t>専門担当のアカネに点検してもらう</a:t>
             </a:r>
             <a:endParaRPr lang="en-US" sz="1300" dirty="0"/>
           </a:p>
@@ -14995,7 +14995,7 @@
         <p:spPr>
           <a:xfrm>
             <a:off x="1054100" y="3291780"/>
-            <a:ext cx="3026003" cy="388541"/>
+            <a:ext cx="1246684" cy="388541"/>
           </a:xfrm>
           <a:prstGeom prst="rect">
             <a:avLst/>
@@ -15024,7 +15024,7 @@
                 <a:ea typeface="Zen Maru Gothic" pitchFamily="34" charset="-122"/>
                 <a:cs typeface="Zen Maru Gothic" pitchFamily="34" charset="-120"/>
               </a:rPr>
-              <a:t>ネタ出し担当</a:t>
+              <a:t>💡 ヒラク</a:t>
             </a:r>
             <a:endParaRPr lang="en-US" sz="2200" dirty="0"/>
           </a:p>
@@ -15038,29 +15038,29 @@
         </p:nvSpPr>
         <p:spPr>
           <a:xfrm>
-            <a:off x="1054100" y="3743821"/>
-            <a:ext cx="3026003" cy="576461"/>
-          </a:xfrm>
-          <a:prstGeom prst="rect">
-            <a:avLst/>
-          </a:prstGeom>
-          <a:noFill/>
-          <a:ln/>
-        </p:spPr>
-        <p:txBody>
-          <a:bodyPr wrap="square" lIns="0" tIns="0" rIns="0" bIns="0" rtlCol="0" anchor="t">
-            <a:normAutofit/>
-          </a:bodyPr>
-          <a:lstStyle/>
-          <a:p>
-            <a:pPr algn="l" indent="0" marL="0">
-              <a:lnSpc>
-                <a:spcPts val="2170"/>
-              </a:lnSpc>
-              <a:buNone/>
-            </a:pPr>
-            <a:r>
-              <a:rPr lang="en-US" sz="1400" dirty="0">
+            <a:off x="2351584" y="3406080"/>
+            <a:ext cx="1066105" cy="256480"/>
+          </a:xfrm>
+          <a:prstGeom prst="rect">
+            <a:avLst/>
+          </a:prstGeom>
+          <a:noFill/>
+          <a:ln/>
+        </p:spPr>
+        <p:txBody>
+          <a:bodyPr wrap="square" lIns="0" tIns="0" rIns="0" bIns="0" rtlCol="0" anchor="t">
+            <a:normAutofit/>
+          </a:bodyPr>
+          <a:lstStyle/>
+          <a:p>
+            <a:pPr algn="l" indent="0" marL="0">
+              <a:lnSpc>
+                <a:spcPts val="1820"/>
+              </a:lnSpc>
+              <a:buNone/>
+            </a:pPr>
+            <a:r>
+              <a:rPr lang="en-US" sz="1400" b="1" dirty="0">
                 <a:solidFill>
                   <a:srgbClr val="56647E"/>
                 </a:solidFill>
@@ -15068,7 +15068,7 @@
                 <a:ea typeface="BIZ UDPGothic" pitchFamily="34" charset="-122"/>
                 <a:cs typeface="BIZ UDPGothic" pitchFamily="34" charset="-120"/>
               </a:rPr>
-              <a:t>思いつきから、記事ネタの切り口を複数ならべる。選ぶのは人。</a:t>
+              <a:t>ネタ出し担当</a:t>
             </a:r>
             <a:endParaRPr lang="en-US" sz="1400" dirty="0"/>
           </a:p>
@@ -15082,39 +15082,39 @@
         </p:nvSpPr>
         <p:spPr>
           <a:xfrm>
-            <a:off x="1054100" y="4383782"/>
-            <a:ext cx="3026003" cy="273050"/>
-          </a:xfrm>
-          <a:prstGeom prst="rect">
-            <a:avLst/>
-          </a:prstGeom>
-          <a:noFill/>
-          <a:ln/>
-        </p:spPr>
-        <p:txBody>
-          <a:bodyPr wrap="square" lIns="0" tIns="0" rIns="0" bIns="0" rtlCol="0" anchor="t">
-            <a:normAutofit/>
-          </a:bodyPr>
-          <a:lstStyle/>
-          <a:p>
-            <a:pPr algn="l" indent="0" marL="0">
-              <a:lnSpc>
-                <a:spcPts val="1950"/>
-              </a:lnSpc>
-              <a:buNone/>
-            </a:pPr>
-            <a:r>
-              <a:rPr lang="en-US" sz="1300" b="1" dirty="0">
-                <a:solidFill>
-                  <a:srgbClr val="16233B"/>
+            <a:off x="1054100" y="3743821"/>
+            <a:ext cx="3026003" cy="576461"/>
+          </a:xfrm>
+          <a:prstGeom prst="rect">
+            <a:avLst/>
+          </a:prstGeom>
+          <a:noFill/>
+          <a:ln/>
+        </p:spPr>
+        <p:txBody>
+          <a:bodyPr wrap="square" lIns="0" tIns="0" rIns="0" bIns="0" rtlCol="0" anchor="t">
+            <a:normAutofit/>
+          </a:bodyPr>
+          <a:lstStyle/>
+          <a:p>
+            <a:pPr algn="l" indent="0" marL="0">
+              <a:lnSpc>
+                <a:spcPts val="2170"/>
+              </a:lnSpc>
+              <a:buNone/>
+            </a:pPr>
+            <a:r>
+              <a:rPr lang="en-US" sz="1400" dirty="0">
+                <a:solidFill>
+                  <a:srgbClr val="56647E"/>
                 </a:solidFill>
                 <a:latin typeface="BIZ UDPGothic" pitchFamily="34" charset="0"/>
                 <a:ea typeface="BIZ UDPGothic" pitchFamily="34" charset="-122"/>
                 <a:cs typeface="BIZ UDPGothic" pitchFamily="34" charset="-120"/>
               </a:rPr>
-              <a:t>道具：読む・探す・ネットで調べる</a:t>
-            </a:r>
-            <a:endParaRPr lang="en-US" sz="1300" dirty="0"/>
+              <a:t>思いつきから、記事ネタの切り口を複数ならべる。選ぶのは人。</a:t>
+            </a:r>
+            <a:endParaRPr lang="en-US" sz="1400" dirty="0"/>
           </a:p>
         </p:txBody>
       </p:sp>
@@ -15126,7 +15126,7 @@
         </p:nvSpPr>
         <p:spPr>
           <a:xfrm>
-            <a:off x="1054100" y="4720332"/>
+            <a:off x="1054100" y="4383782"/>
             <a:ext cx="3026003" cy="273050"/>
           </a:xfrm>
           <a:prstGeom prst="rect">
@@ -15150,12 +15150,56 @@
             <a:r>
               <a:rPr lang="en-US" sz="1300" b="1" dirty="0">
                 <a:solidFill>
-                  <a:srgbClr val="2350C9"/>
+                  <a:srgbClr val="16233B"/>
                 </a:solidFill>
                 <a:latin typeface="BIZ UDPGothic" pitchFamily="34" charset="0"/>
                 <a:ea typeface="BIZ UDPGothic" pitchFamily="34" charset="-122"/>
                 <a:cs typeface="BIZ UDPGothic" pitchFamily="34" charset="-120"/>
               </a:rPr>
+              <a:t>道具：読む・探す・ネットで調べる</a:t>
+            </a:r>
+            <a:endParaRPr lang="en-US" sz="1300" dirty="0"/>
+          </a:p>
+        </p:txBody>
+      </p:sp>
+      <p:sp>
+        <p:nvSpPr>
+          <p:cNvPr id="13" name="Text 10"/>
+          <p:cNvSpPr/>
+          <p:nvPr/>
+        </p:nvSpPr>
+        <p:spPr>
+          <a:xfrm>
+            <a:off x="1054100" y="4720332"/>
+            <a:ext cx="3026003" cy="273050"/>
+          </a:xfrm>
+          <a:prstGeom prst="rect">
+            <a:avLst/>
+          </a:prstGeom>
+          <a:noFill/>
+          <a:ln/>
+        </p:spPr>
+        <p:txBody>
+          <a:bodyPr wrap="square" lIns="0" tIns="0" rIns="0" bIns="0" rtlCol="0" anchor="t">
+            <a:normAutofit/>
+          </a:bodyPr>
+          <a:lstStyle/>
+          <a:p>
+            <a:pPr algn="l" indent="0" marL="0">
+              <a:lnSpc>
+                <a:spcPts val="1950"/>
+              </a:lnSpc>
+              <a:buNone/>
+            </a:pPr>
+            <a:r>
+              <a:rPr lang="en-US" sz="1300" b="1" dirty="0">
+                <a:solidFill>
+                  <a:srgbClr val="2350C9"/>
+                </a:solidFill>
+                <a:latin typeface="BIZ UDPGothic" pitchFamily="34" charset="0"/>
+                <a:ea typeface="BIZ UDPGothic" pitchFamily="34" charset="-122"/>
+                <a:cs typeface="BIZ UDPGothic" pitchFamily="34" charset="-120"/>
+              </a:rPr>
               <a:t>呼ぶ場面：/add-idea の中</a:t>
             </a:r>
             <a:endParaRPr lang="en-US" sz="1300" dirty="0"/>
@@ -15164,7 +15208,7 @@
       </p:sp>
       <p:sp>
         <p:nvSpPr>
-          <p:cNvPr id="13" name="Shape 10"/>
+          <p:cNvPr id="14" name="Shape 11"/>
           <p:cNvSpPr/>
           <p:nvPr/>
         </p:nvSpPr>
@@ -15191,7 +15235,7 @@
       </p:sp>
       <p:sp>
         <p:nvSpPr>
-          <p:cNvPr id="14" name="Shape 11"/>
+          <p:cNvPr id="15" name="Shape 12"/>
           <p:cNvSpPr/>
           <p:nvPr/>
         </p:nvSpPr>
@@ -15213,7 +15257,7 @@
       </p:sp>
       <p:pic>
         <p:nvPicPr>
-          <p:cNvPr id="15" name="Image 1" descr="Lock">    </p:cNvPr>
+          <p:cNvPr id="16" name="Image 1" descr="Lock">    </p:cNvPr>
           <p:cNvPicPr>
             <a:picLocks noChangeAspect="1"/>
           </p:cNvPicPr>
@@ -15236,7 +15280,7 @@
       </p:pic>
       <p:sp>
         <p:nvSpPr>
-          <p:cNvPr id="16" name="Shape 12"/>
+          <p:cNvPr id="17" name="Shape 13"/>
           <p:cNvSpPr/>
           <p:nvPr/>
         </p:nvSpPr>
@@ -15258,7 +15302,7 @@
       </p:sp>
       <p:sp>
         <p:nvSpPr>
-          <p:cNvPr id="17" name="Text 13"/>
+          <p:cNvPr id="18" name="Text 14"/>
           <p:cNvSpPr/>
           <p:nvPr/>
         </p:nvSpPr>
@@ -15302,14 +15346,14 @@
       </p:sp>
       <p:sp>
         <p:nvSpPr>
-          <p:cNvPr id="18" name="Text 14"/>
+          <p:cNvPr id="19" name="Text 15"/>
           <p:cNvSpPr/>
           <p:nvPr/>
         </p:nvSpPr>
         <p:spPr>
           <a:xfrm>
             <a:off x="4626967" y="3291780"/>
-            <a:ext cx="3026105" cy="388541"/>
+            <a:ext cx="967284" cy="388541"/>
           </a:xfrm>
           <a:prstGeom prst="rect">
             <a:avLst/>
@@ -15338,7 +15382,7 @@
                 <a:ea typeface="Zen Maru Gothic" pitchFamily="34" charset="-122"/>
                 <a:cs typeface="Zen Maru Gothic" pitchFamily="34" charset="-120"/>
               </a:rPr>
-              <a:t>ネタ帳の門番</a:t>
+              <a:t>🗃️ クラ</a:t>
             </a:r>
             <a:endParaRPr lang="en-US" sz="2200" dirty="0"/>
           </a:p>
@@ -15346,35 +15390,35 @@
       </p:sp>
       <p:sp>
         <p:nvSpPr>
-          <p:cNvPr id="19" name="Text 15"/>
-          <p:cNvSpPr/>
-          <p:nvPr/>
-        </p:nvSpPr>
-        <p:spPr>
-          <a:xfrm>
-            <a:off x="4626967" y="3743821"/>
-            <a:ext cx="3026105" cy="851991"/>
-          </a:xfrm>
-          <a:prstGeom prst="rect">
-            <a:avLst/>
-          </a:prstGeom>
-          <a:noFill/>
-          <a:ln/>
-        </p:spPr>
-        <p:txBody>
-          <a:bodyPr wrap="square" lIns="0" tIns="0" rIns="0" bIns="0" rtlCol="0" anchor="t">
-            <a:normAutofit/>
-          </a:bodyPr>
-          <a:lstStyle/>
-          <a:p>
-            <a:pPr algn="l" indent="0" marL="0">
-              <a:lnSpc>
-                <a:spcPts val="2170"/>
-              </a:lnSpc>
-              <a:buNone/>
-            </a:pPr>
-            <a:r>
-              <a:rPr lang="en-US" sz="1400" dirty="0">
+          <p:cNvPr id="20" name="Text 16"/>
+          <p:cNvSpPr/>
+          <p:nvPr/>
+        </p:nvSpPr>
+        <p:spPr>
+          <a:xfrm>
+            <a:off x="5645051" y="3406080"/>
+            <a:ext cx="1089124" cy="256480"/>
+          </a:xfrm>
+          <a:prstGeom prst="rect">
+            <a:avLst/>
+          </a:prstGeom>
+          <a:noFill/>
+          <a:ln/>
+        </p:spPr>
+        <p:txBody>
+          <a:bodyPr wrap="square" lIns="0" tIns="0" rIns="0" bIns="0" rtlCol="0" anchor="t">
+            <a:normAutofit/>
+          </a:bodyPr>
+          <a:lstStyle/>
+          <a:p>
+            <a:pPr algn="l" indent="0" marL="0">
+              <a:lnSpc>
+                <a:spcPts val="1820"/>
+              </a:lnSpc>
+              <a:buNone/>
+            </a:pPr>
+            <a:r>
+              <a:rPr lang="en-US" sz="1400" b="1" dirty="0">
                 <a:solidFill>
                   <a:srgbClr val="56647E"/>
                 </a:solidFill>
@@ -15382,7 +15426,7 @@
                 <a:ea typeface="BIZ UDPGothic" pitchFamily="34" charset="-122"/>
                 <a:cs typeface="BIZ UDPGothic" pitchFamily="34" charset="-120"/>
               </a:rPr>
-              <a:t>重複していないか、書けるネタか、価値があるかを審査する。落とすときは代わりの置き場所も示す。</a:t>
+              <a:t>ネタ帳の門番</a:t>
             </a:r>
             <a:endParaRPr lang="en-US" sz="1400" dirty="0"/>
           </a:p>
@@ -15390,57 +15434,57 @@
       </p:sp>
       <p:sp>
         <p:nvSpPr>
-          <p:cNvPr id="20" name="Text 16"/>
-          <p:cNvSpPr/>
-          <p:nvPr/>
-        </p:nvSpPr>
-        <p:spPr>
-          <a:xfrm>
-            <a:off x="4626967" y="4659313"/>
-            <a:ext cx="3026105" cy="273050"/>
-          </a:xfrm>
-          <a:prstGeom prst="rect">
-            <a:avLst/>
-          </a:prstGeom>
-          <a:noFill/>
-          <a:ln/>
-        </p:spPr>
-        <p:txBody>
-          <a:bodyPr wrap="square" lIns="0" tIns="0" rIns="0" bIns="0" rtlCol="0" anchor="t">
-            <a:normAutofit/>
-          </a:bodyPr>
-          <a:lstStyle/>
-          <a:p>
-            <a:pPr algn="l" indent="0" marL="0">
-              <a:lnSpc>
-                <a:spcPts val="1950"/>
-              </a:lnSpc>
-              <a:buNone/>
-            </a:pPr>
-            <a:r>
-              <a:rPr lang="en-US" sz="1300" b="1" dirty="0">
-                <a:solidFill>
-                  <a:srgbClr val="16233B"/>
+          <p:cNvPr id="21" name="Text 17"/>
+          <p:cNvSpPr/>
+          <p:nvPr/>
+        </p:nvSpPr>
+        <p:spPr>
+          <a:xfrm>
+            <a:off x="4626967" y="3743821"/>
+            <a:ext cx="3026105" cy="851991"/>
+          </a:xfrm>
+          <a:prstGeom prst="rect">
+            <a:avLst/>
+          </a:prstGeom>
+          <a:noFill/>
+          <a:ln/>
+        </p:spPr>
+        <p:txBody>
+          <a:bodyPr wrap="square" lIns="0" tIns="0" rIns="0" bIns="0" rtlCol="0" anchor="t">
+            <a:normAutofit/>
+          </a:bodyPr>
+          <a:lstStyle/>
+          <a:p>
+            <a:pPr algn="l" indent="0" marL="0">
+              <a:lnSpc>
+                <a:spcPts val="2170"/>
+              </a:lnSpc>
+              <a:buNone/>
+            </a:pPr>
+            <a:r>
+              <a:rPr lang="en-US" sz="1400" dirty="0">
+                <a:solidFill>
+                  <a:srgbClr val="56647E"/>
                 </a:solidFill>
                 <a:latin typeface="BIZ UDPGothic" pitchFamily="34" charset="0"/>
                 <a:ea typeface="BIZ UDPGothic" pitchFamily="34" charset="-122"/>
                 <a:cs typeface="BIZ UDPGothic" pitchFamily="34" charset="-120"/>
               </a:rPr>
-              <a:t>道具：読む・探す</a:t>
-            </a:r>
-            <a:endParaRPr lang="en-US" sz="1300" dirty="0"/>
-          </a:p>
-        </p:txBody>
-      </p:sp>
-      <p:sp>
-        <p:nvSpPr>
-          <p:cNvPr id="21" name="Text 17"/>
-          <p:cNvSpPr/>
-          <p:nvPr/>
-        </p:nvSpPr>
-        <p:spPr>
-          <a:xfrm>
-            <a:off x="4626967" y="4995863"/>
+              <a:t>重複していないか、書けるネタか、価値があるかを審査する。落とすときは代わりの置き場所も示す。</a:t>
+            </a:r>
+            <a:endParaRPr lang="en-US" sz="1400" dirty="0"/>
+          </a:p>
+        </p:txBody>
+      </p:sp>
+      <p:sp>
+        <p:nvSpPr>
+          <p:cNvPr id="22" name="Text 18"/>
+          <p:cNvSpPr/>
+          <p:nvPr/>
+        </p:nvSpPr>
+        <p:spPr>
+          <a:xfrm>
+            <a:off x="4626967" y="4659313"/>
             <a:ext cx="3026105" cy="273050"/>
           </a:xfrm>
           <a:prstGeom prst="rect">
@@ -15464,12 +15508,56 @@
             <a:r>
               <a:rPr lang="en-US" sz="1300" b="1" dirty="0">
                 <a:solidFill>
-                  <a:srgbClr val="2350C9"/>
+                  <a:srgbClr val="16233B"/>
                 </a:solidFill>
                 <a:latin typeface="BIZ UDPGothic" pitchFamily="34" charset="0"/>
                 <a:ea typeface="BIZ UDPGothic" pitchFamily="34" charset="-122"/>
                 <a:cs typeface="BIZ UDPGothic" pitchFamily="34" charset="-120"/>
               </a:rPr>
+              <a:t>道具：読む・探す</a:t>
+            </a:r>
+            <a:endParaRPr lang="en-US" sz="1300" dirty="0"/>
+          </a:p>
+        </p:txBody>
+      </p:sp>
+      <p:sp>
+        <p:nvSpPr>
+          <p:cNvPr id="23" name="Text 19"/>
+          <p:cNvSpPr/>
+          <p:nvPr/>
+        </p:nvSpPr>
+        <p:spPr>
+          <a:xfrm>
+            <a:off x="4626967" y="4995863"/>
+            <a:ext cx="3026105" cy="273050"/>
+          </a:xfrm>
+          <a:prstGeom prst="rect">
+            <a:avLst/>
+          </a:prstGeom>
+          <a:noFill/>
+          <a:ln/>
+        </p:spPr>
+        <p:txBody>
+          <a:bodyPr wrap="square" lIns="0" tIns="0" rIns="0" bIns="0" rtlCol="0" anchor="t">
+            <a:normAutofit/>
+          </a:bodyPr>
+          <a:lstStyle/>
+          <a:p>
+            <a:pPr algn="l" indent="0" marL="0">
+              <a:lnSpc>
+                <a:spcPts val="1950"/>
+              </a:lnSpc>
+              <a:buNone/>
+            </a:pPr>
+            <a:r>
+              <a:rPr lang="en-US" sz="1300" b="1" dirty="0">
+                <a:solidFill>
+                  <a:srgbClr val="2350C9"/>
+                </a:solidFill>
+                <a:latin typeface="BIZ UDPGothic" pitchFamily="34" charset="0"/>
+                <a:ea typeface="BIZ UDPGothic" pitchFamily="34" charset="-122"/>
+                <a:cs typeface="BIZ UDPGothic" pitchFamily="34" charset="-120"/>
+              </a:rPr>
               <a:t>呼ぶ場面：/add-idea の中</a:t>
             </a:r>
             <a:endParaRPr lang="en-US" sz="1300" dirty="0"/>
@@ -15478,7 +15566,7 @@
       </p:sp>
       <p:sp>
         <p:nvSpPr>
-          <p:cNvPr id="22" name="Shape 18"/>
+          <p:cNvPr id="24" name="Shape 20"/>
           <p:cNvSpPr/>
           <p:nvPr/>
         </p:nvSpPr>
@@ -15505,7 +15593,7 @@
       </p:sp>
       <p:sp>
         <p:nvSpPr>
-          <p:cNvPr id="23" name="Shape 19"/>
+          <p:cNvPr id="25" name="Shape 21"/>
           <p:cNvSpPr/>
           <p:nvPr/>
         </p:nvSpPr>
@@ -15527,7 +15615,7 @@
       </p:sp>
       <p:pic>
         <p:nvPicPr>
-          <p:cNvPr id="24" name="Image 2" descr="CheckCircle">    </p:cNvPr>
+          <p:cNvPr id="26" name="Image 2" descr="CheckCircle">    </p:cNvPr>
           <p:cNvPicPr>
             <a:picLocks noChangeAspect="1"/>
           </p:cNvPicPr>
@@ -15550,7 +15638,7 @@
       </p:pic>
       <p:sp>
         <p:nvSpPr>
-          <p:cNvPr id="25" name="Shape 20"/>
+          <p:cNvPr id="27" name="Shape 22"/>
           <p:cNvSpPr/>
           <p:nvPr/>
         </p:nvSpPr>
@@ -15572,7 +15660,7 @@
       </p:sp>
       <p:sp>
         <p:nvSpPr>
-          <p:cNvPr id="26" name="Text 21"/>
+          <p:cNvPr id="28" name="Text 23"/>
           <p:cNvSpPr/>
           <p:nvPr/>
         </p:nvSpPr>
@@ -15616,14 +15704,14 @@
       </p:sp>
       <p:sp>
         <p:nvSpPr>
-          <p:cNvPr id="27" name="Text 22"/>
+          <p:cNvPr id="29" name="Text 24"/>
           <p:cNvSpPr/>
           <p:nvPr/>
         </p:nvSpPr>
         <p:spPr>
           <a:xfrm>
             <a:off x="8199934" y="3291780"/>
-            <a:ext cx="3026105" cy="388541"/>
+            <a:ext cx="1246684" cy="388541"/>
           </a:xfrm>
           <a:prstGeom prst="rect">
             <a:avLst/>
@@ -15652,7 +15740,7 @@
                 <a:ea typeface="Zen Maru Gothic" pitchFamily="34" charset="-122"/>
                 <a:cs typeface="Zen Maru Gothic" pitchFamily="34" charset="-120"/>
               </a:rPr>
-              <a:t>校閲担当</a:t>
+              <a:t>🖍️ アカネ</a:t>
             </a:r>
             <a:endParaRPr lang="en-US" sz="2200" dirty="0"/>
           </a:p>
@@ -15660,35 +15748,35 @@
       </p:sp>
       <p:sp>
         <p:nvSpPr>
-          <p:cNvPr id="28" name="Text 23"/>
-          <p:cNvSpPr/>
-          <p:nvPr/>
-        </p:nvSpPr>
-        <p:spPr>
-          <a:xfrm>
-            <a:off x="8199934" y="3743821"/>
-            <a:ext cx="3026105" cy="851991"/>
-          </a:xfrm>
-          <a:prstGeom prst="rect">
-            <a:avLst/>
-          </a:prstGeom>
-          <a:noFill/>
-          <a:ln/>
-        </p:spPr>
-        <p:txBody>
-          <a:bodyPr wrap="square" lIns="0" tIns="0" rIns="0" bIns="0" rtlCol="0" anchor="t">
-            <a:normAutofit/>
-          </a:bodyPr>
-          <a:lstStyle/>
-          <a:p>
-            <a:pPr algn="l" indent="0" marL="0">
-              <a:lnSpc>
-                <a:spcPts val="2170"/>
-              </a:lnSpc>
-              <a:buNone/>
-            </a:pPr>
-            <a:r>
-              <a:rPr lang="en-US" sz="1400" dirty="0">
+          <p:cNvPr id="30" name="Text 25"/>
+          <p:cNvSpPr/>
+          <p:nvPr/>
+        </p:nvSpPr>
+        <p:spPr>
+          <a:xfrm>
+            <a:off x="9497417" y="3406080"/>
+            <a:ext cx="762000" cy="256480"/>
+          </a:xfrm>
+          <a:prstGeom prst="rect">
+            <a:avLst/>
+          </a:prstGeom>
+          <a:noFill/>
+          <a:ln/>
+        </p:spPr>
+        <p:txBody>
+          <a:bodyPr wrap="square" lIns="0" tIns="0" rIns="0" bIns="0" rtlCol="0" anchor="t">
+            <a:normAutofit/>
+          </a:bodyPr>
+          <a:lstStyle/>
+          <a:p>
+            <a:pPr algn="l" indent="0" marL="0">
+              <a:lnSpc>
+                <a:spcPts val="1820"/>
+              </a:lnSpc>
+              <a:buNone/>
+            </a:pPr>
+            <a:r>
+              <a:rPr lang="en-US" sz="1400" b="1" dirty="0">
                 <a:solidFill>
                   <a:srgbClr val="56647E"/>
                 </a:solidFill>
@@ -15696,7 +15784,7 @@
                 <a:ea typeface="BIZ UDPGothic" pitchFamily="34" charset="-122"/>
                 <a:cs typeface="BIZ UDPGothic" pitchFamily="34" charset="-120"/>
               </a:rPr>
-              <a:t>下書きをルールブックと照らして点検する。直す価値のある指摘だけを、直し方つきで返す。</a:t>
+              <a:t>校閲担当</a:t>
             </a:r>
             <a:endParaRPr lang="en-US" sz="1400" dirty="0"/>
           </a:p>
@@ -15704,57 +15792,57 @@
       </p:sp>
       <p:sp>
         <p:nvSpPr>
-          <p:cNvPr id="29" name="Text 24"/>
-          <p:cNvSpPr/>
-          <p:nvPr/>
-        </p:nvSpPr>
-        <p:spPr>
-          <a:xfrm>
-            <a:off x="8199934" y="4659313"/>
-            <a:ext cx="3026105" cy="273050"/>
-          </a:xfrm>
-          <a:prstGeom prst="rect">
-            <a:avLst/>
-          </a:prstGeom>
-          <a:noFill/>
-          <a:ln/>
-        </p:spPr>
-        <p:txBody>
-          <a:bodyPr wrap="square" lIns="0" tIns="0" rIns="0" bIns="0" rtlCol="0" anchor="t">
-            <a:normAutofit/>
-          </a:bodyPr>
-          <a:lstStyle/>
-          <a:p>
-            <a:pPr algn="l" indent="0" marL="0">
-              <a:lnSpc>
-                <a:spcPts val="1950"/>
-              </a:lnSpc>
-              <a:buNone/>
-            </a:pPr>
-            <a:r>
-              <a:rPr lang="en-US" sz="1300" b="1" dirty="0">
-                <a:solidFill>
-                  <a:srgbClr val="16233B"/>
+          <p:cNvPr id="31" name="Text 26"/>
+          <p:cNvSpPr/>
+          <p:nvPr/>
+        </p:nvSpPr>
+        <p:spPr>
+          <a:xfrm>
+            <a:off x="8199934" y="3743821"/>
+            <a:ext cx="3026105" cy="851991"/>
+          </a:xfrm>
+          <a:prstGeom prst="rect">
+            <a:avLst/>
+          </a:prstGeom>
+          <a:noFill/>
+          <a:ln/>
+        </p:spPr>
+        <p:txBody>
+          <a:bodyPr wrap="square" lIns="0" tIns="0" rIns="0" bIns="0" rtlCol="0" anchor="t">
+            <a:normAutofit/>
+          </a:bodyPr>
+          <a:lstStyle/>
+          <a:p>
+            <a:pPr algn="l" indent="0" marL="0">
+              <a:lnSpc>
+                <a:spcPts val="2170"/>
+              </a:lnSpc>
+              <a:buNone/>
+            </a:pPr>
+            <a:r>
+              <a:rPr lang="en-US" sz="1400" dirty="0">
+                <a:solidFill>
+                  <a:srgbClr val="56647E"/>
                 </a:solidFill>
                 <a:latin typeface="BIZ UDPGothic" pitchFamily="34" charset="0"/>
                 <a:ea typeface="BIZ UDPGothic" pitchFamily="34" charset="-122"/>
                 <a:cs typeface="BIZ UDPGothic" pitchFamily="34" charset="-120"/>
               </a:rPr>
-              <a:t>道具：読む・探す</a:t>
-            </a:r>
-            <a:endParaRPr lang="en-US" sz="1300" dirty="0"/>
-          </a:p>
-        </p:txBody>
-      </p:sp>
-      <p:sp>
-        <p:nvSpPr>
-          <p:cNvPr id="30" name="Text 25"/>
-          <p:cNvSpPr/>
-          <p:nvPr/>
-        </p:nvSpPr>
-        <p:spPr>
-          <a:xfrm>
-            <a:off x="8199934" y="4995863"/>
+              <a:t>下書きをルールブックと照らして点検する。直す価値のある指摘だけを、直し方つきで返す。</a:t>
+            </a:r>
+            <a:endParaRPr lang="en-US" sz="1400" dirty="0"/>
+          </a:p>
+        </p:txBody>
+      </p:sp>
+      <p:sp>
+        <p:nvSpPr>
+          <p:cNvPr id="32" name="Text 27"/>
+          <p:cNvSpPr/>
+          <p:nvPr/>
+        </p:nvSpPr>
+        <p:spPr>
+          <a:xfrm>
+            <a:off x="8199934" y="4659313"/>
             <a:ext cx="3026105" cy="273050"/>
           </a:xfrm>
           <a:prstGeom prst="rect">
@@ -15778,13 +15866,13 @@
             <a:r>
               <a:rPr lang="en-US" sz="1300" b="1" dirty="0">
                 <a:solidFill>
-                  <a:srgbClr val="2350C9"/>
+                  <a:srgbClr val="16233B"/>
                 </a:solidFill>
                 <a:latin typeface="BIZ UDPGothic" pitchFamily="34" charset="0"/>
                 <a:ea typeface="BIZ UDPGothic" pitchFamily="34" charset="-122"/>
                 <a:cs typeface="BIZ UDPGothic" pitchFamily="34" charset="-120"/>
               </a:rPr>
-              <a:t>呼ぶ場面：/write-post の校閲</a:t>
+              <a:t>道具：読む・探す</a:t>
             </a:r>
             <a:endParaRPr lang="en-US" sz="1300" dirty="0"/>
           </a:p>
@@ -15792,42 +15880,86 @@
       </p:sp>
       <p:sp>
         <p:nvSpPr>
-          <p:cNvPr id="31" name="Text 26"/>
-          <p:cNvSpPr/>
-          <p:nvPr/>
-        </p:nvSpPr>
-        <p:spPr>
-          <a:xfrm>
-            <a:off x="812800" y="6238280"/>
-            <a:ext cx="7194550" cy="238720"/>
-          </a:xfrm>
-          <a:prstGeom prst="rect">
-            <a:avLst/>
-          </a:prstGeom>
-          <a:noFill/>
-          <a:ln/>
-        </p:spPr>
-        <p:txBody>
-          <a:bodyPr wrap="square" lIns="0" tIns="0" rIns="0" bIns="0" rtlCol="0" anchor="t">
-            <a:normAutofit/>
-          </a:bodyPr>
-          <a:lstStyle/>
-          <a:p>
-            <a:pPr algn="l" indent="0" marL="0">
-              <a:lnSpc>
-                <a:spcPts val="1680"/>
-              </a:lnSpc>
-              <a:buNone/>
-            </a:pPr>
-            <a:r>
-              <a:rPr lang="en-US" sz="1200" dirty="0">
-                <a:solidFill>
-                  <a:srgbClr val="56647E"/>
+          <p:cNvPr id="33" name="Text 28"/>
+          <p:cNvSpPr/>
+          <p:nvPr/>
+        </p:nvSpPr>
+        <p:spPr>
+          <a:xfrm>
+            <a:off x="8199934" y="4995863"/>
+            <a:ext cx="3026105" cy="273050"/>
+          </a:xfrm>
+          <a:prstGeom prst="rect">
+            <a:avLst/>
+          </a:prstGeom>
+          <a:noFill/>
+          <a:ln/>
+        </p:spPr>
+        <p:txBody>
+          <a:bodyPr wrap="square" lIns="0" tIns="0" rIns="0" bIns="0" rtlCol="0" anchor="t">
+            <a:normAutofit/>
+          </a:bodyPr>
+          <a:lstStyle/>
+          <a:p>
+            <a:pPr algn="l" indent="0" marL="0">
+              <a:lnSpc>
+                <a:spcPts val="1950"/>
+              </a:lnSpc>
+              <a:buNone/>
+            </a:pPr>
+            <a:r>
+              <a:rPr lang="en-US" sz="1300" b="1" dirty="0">
+                <a:solidFill>
+                  <a:srgbClr val="2350C9"/>
                 </a:solidFill>
                 <a:latin typeface="BIZ UDPGothic" pitchFamily="34" charset="0"/>
                 <a:ea typeface="BIZ UDPGothic" pitchFamily="34" charset="-122"/>
                 <a:cs typeface="BIZ UDPGothic" pitchFamily="34" charset="-120"/>
               </a:rPr>
+              <a:t>呼ぶ場面：/write-post の校閲</a:t>
+            </a:r>
+            <a:endParaRPr lang="en-US" sz="1300" dirty="0"/>
+          </a:p>
+        </p:txBody>
+      </p:sp>
+      <p:sp>
+        <p:nvSpPr>
+          <p:cNvPr id="34" name="Text 29"/>
+          <p:cNvSpPr/>
+          <p:nvPr/>
+        </p:nvSpPr>
+        <p:spPr>
+          <a:xfrm>
+            <a:off x="812800" y="6238280"/>
+            <a:ext cx="7194550" cy="238720"/>
+          </a:xfrm>
+          <a:prstGeom prst="rect">
+            <a:avLst/>
+          </a:prstGeom>
+          <a:noFill/>
+          <a:ln/>
+        </p:spPr>
+        <p:txBody>
+          <a:bodyPr wrap="square" lIns="0" tIns="0" rIns="0" bIns="0" rtlCol="0" anchor="t">
+            <a:normAutofit/>
+          </a:bodyPr>
+          <a:lstStyle/>
+          <a:p>
+            <a:pPr algn="l" indent="0" marL="0">
+              <a:lnSpc>
+                <a:spcPts val="1680"/>
+              </a:lnSpc>
+              <a:buNone/>
+            </a:pPr>
+            <a:r>
+              <a:rPr lang="en-US" sz="1200" dirty="0">
+                <a:solidFill>
+                  <a:srgbClr val="56647E"/>
+                </a:solidFill>
+                <a:latin typeface="BIZ UDPGothic" pitchFamily="34" charset="0"/>
+                <a:ea typeface="BIZ UDPGothic" pitchFamily="34" charset="-122"/>
+                <a:cs typeface="BIZ UDPGothic" pitchFamily="34" charset="-120"/>
+              </a:rPr>
               <a:t>明日使える生成AI ／ ブログのひみつ</a:t>
             </a:r>
             <a:endParaRPr lang="en-US" sz="1200" dirty="0"/>
@@ -15836,7 +15968,7 @@
       </p:sp>
       <p:sp>
         <p:nvSpPr>
-          <p:cNvPr id="32" name="Text 27"/>
+          <p:cNvPr id="35" name="Text 30"/>
           <p:cNvSpPr/>
           <p:nvPr/>
         </p:nvSpPr>
@@ -16500,7 +16632,7 @@
                 <a:ea typeface="Source Code Pro" pitchFamily="34" charset="-122"/>
                 <a:cs typeface="Source Code Pro" pitchFamily="34" charset="-120"/>
               </a:rPr>
-              <a:t>idea-generator</a:t>
+              <a:t>💡 ヒラク</a:t>
             </a:r>
             <a:endParaRPr lang="en-US" sz="1200" dirty="0"/>
           </a:p>
@@ -16677,7 +16809,7 @@
                 <a:ea typeface="Source Code Pro" pitchFamily="34" charset="-122"/>
                 <a:cs typeface="Source Code Pro" pitchFamily="34" charset="-120"/>
               </a:rPr>
-              <a:t>idea-reviewer</a:t>
+              <a:t>🗃️ クラ</a:t>
             </a:r>
             <a:endParaRPr lang="en-US" sz="1200" dirty="0"/>
           </a:p>
@@ -17451,7 +17583,7 @@
                 <a:ea typeface="Source Code Pro" pitchFamily="34" charset="-122"/>
                 <a:cs typeface="Source Code Pro" pitchFamily="34" charset="-120"/>
               </a:rPr>
-              <a:t>post-reviewer</a:t>
+              <a:t>🖍️ アカネ</a:t>
             </a:r>
             <a:endParaRPr lang="en-US" sz="1200" dirty="0"/>
           </a:p>
@@ -22626,11 +22758,35 @@
             <a:off x="812800" y="1866602"/>
             <a:ext cx="5969000" cy="450850"/>
           </a:xfrm>
-          <a:prstGeom prst="roundRect">
-            <a:avLst>
-              <a:gd name="adj" fmla="val 28169"/>
-            </a:avLst>
-          </a:prstGeom>
+          <a:custGeom>
+            <a:avLst/>
+            <a:gdLst/>
+            <a:ahLst/>
+            <a:cxnLst/>
+            <a:rect l="l" t="t" r="r" b="b"/>
+            <a:pathLst>
+              <a:path w="5969000" h="450850">
+                <a:moveTo>
+                  <a:pt x="127000" y="0"/>
+                </a:moveTo>
+                <a:lnTo>
+                  <a:pt x="5842000" y="0"/>
+                </a:lnTo>
+                <a:arcTo hR="127000" wR="127000" stAng="16200000" swAng="5400000"/>
+                <a:lnTo>
+                  <a:pt x="5969000" y="450850"/>
+                </a:lnTo>
+                <a:lnTo>
+                  <a:pt x="0" y="450850"/>
+                </a:lnTo>
+                <a:lnTo>
+                  <a:pt x="0" y="127000"/>
+                </a:lnTo>
+                <a:arcTo hR="127000" wR="127000" stAng="10800000" swAng="5400000"/>
+                <a:close/>
+              </a:path>
+            </a:pathLst>
+          </a:custGeom>
           <a:solidFill>
             <a:srgbClr val="2F62E6"/>
           </a:solidFill>
@@ -22692,11 +22848,35 @@
             <a:off x="812800" y="2317452"/>
             <a:ext cx="5969000" cy="3524548"/>
           </a:xfrm>
-          <a:prstGeom prst="roundRect">
-            <a:avLst>
-              <a:gd name="adj" fmla="val 3603"/>
-            </a:avLst>
-          </a:prstGeom>
+          <a:custGeom>
+            <a:avLst/>
+            <a:gdLst/>
+            <a:ahLst/>
+            <a:cxnLst/>
+            <a:rect l="l" t="t" r="r" b="b"/>
+            <a:pathLst>
+              <a:path w="5969000" h="3524548">
+                <a:moveTo>
+                  <a:pt x="0" y="0"/>
+                </a:moveTo>
+                <a:lnTo>
+                  <a:pt x="5969000" y="0"/>
+                </a:lnTo>
+                <a:lnTo>
+                  <a:pt x="5969000" y="3397548"/>
+                </a:lnTo>
+                <a:arcTo hR="127000" wR="127000" stAng="0" swAng="5400000"/>
+                <a:lnTo>
+                  <a:pt x="127000" y="3524548"/>
+                </a:lnTo>
+                <a:arcTo hR="127000" wR="127000" stAng="5400000" swAng="5400000"/>
+                <a:lnTo>
+                  <a:pt x="0" y="0"/>
+                </a:lnTo>
+                <a:close/>
+              </a:path>
+            </a:pathLst>
+          </a:custGeom>
           <a:solidFill>
             <a:srgbClr val="0F1B33"/>
           </a:solidFill>
